--- a/docs/교재/실전반_오프라인/04회차/실전반_오프라인_04회차.pptx
+++ b/docs/교재/실전반_오프라인/04회차/실전반_오프라인_04회차.pptx
@@ -2012,7 +2012,7 @@
           <a:lstStyle/>
           <a:p>
             <a:r>
-              <a:t>뜻은 앞에서 풀었으므로 여기서는 이름과 자리만 확인합니다. 이 넷과 함께 실행 고리, 정보원, 신선도, 멈춤 조건, 보류가 오늘의 용어입니다. 하나를 골라 자료를 덮고 자신의 문장으로 써 보시기 바랍니다.</a:t>
+              <a:t>뜻은 앞에서 풀었으므로 여기서는 이름과 자리만 확인합니다. 이 여섯과 함께 실행 고리, 정보원, 신선도, 멈춤 조건, 보류가 오늘의 용어입니다. 하나를 골라 자료를 덮고 자신의 문장으로 써 보시기 바랍니다.</a:t>
             </a:r>
           </a:p>
         </p:txBody>
@@ -7268,7 +7268,7 @@
       </p:sp>
       <p:pic>
         <p:nvPicPr>
-          <p:cNvPr id="6" name="삽화:세요소.svg" descr="illust_949150519104842724_1791735250.png"/>
+          <p:cNvPr id="6" name="삽화:세요소.svg" descr="illust_2620394902018578088_1791735250.png"/>
           <p:cNvPicPr>
             <a:picLocks noChangeAspect="1"/>
           </p:cNvPicPr>
@@ -9390,7 +9390,7 @@
       </p:sp>
       <p:pic>
         <p:nvPicPr>
-          <p:cNvPr id="6" name="삽화:실행고리.svg" descr="illust_1761871706668428612_1791735250.png"/>
+          <p:cNvPr id="6" name="삽화:실행고리.svg" descr="illust_5875319185426250523_1791735250.png"/>
           <p:cNvPicPr>
             <a:picLocks noChangeAspect="1"/>
           </p:cNvPicPr>
@@ -11725,7 +11725,7 @@
                 <a:ea typeface="맑은 고딕"/>
                 <a:cs typeface="맑은 고딕"/>
               </a:rPr>
-              <a:t>추천안은 원인, 고장 유형, 진단 안내, 판단, 판단 번호의 다섯 항목을 가진 JSON 객체 하나로 제출된다.</a:t>
+              <a:t>추천안은 원인, 고장 유형, 진단 안내, 판단, 판단 번호를 담은 JSON(JavaScript Object Notation) 객체로 제출된다.</a:t>
             </a:r>
           </a:p>
         </p:txBody>
@@ -12594,7 +12594,7 @@
       </p:sp>
       <p:pic>
         <p:nvPicPr>
-          <p:cNvPr id="6" name="삽화:정보원.svg" descr="illust_8818946807840009941_1791735250.png"/>
+          <p:cNvPr id="6" name="삽화:정보원.svg" descr="illust_6171456689795612062_1791735250.png"/>
           <p:cNvPicPr>
             <a:picLocks noChangeAspect="1"/>
           </p:cNvPicPr>
@@ -15213,7 +15213,7 @@
       </p:sp>
       <p:pic>
         <p:nvPicPr>
-          <p:cNvPr id="6" name="삽화:도구경유.svg" descr="illust_5972999187827430312_1791735250.png"/>
+          <p:cNvPr id="6" name="삽화:도구경유.svg" descr="illust_2211609066225757847_1791735250.png"/>
           <p:cNvPicPr>
             <a:picLocks noChangeAspect="1"/>
           </p:cNvPicPr>
@@ -16384,7 +16384,7 @@
       </p:sp>
       <p:pic>
         <p:nvPicPr>
-          <p:cNvPr id="6" name="삽화:신선도.svg" descr="illust_6690275683915074220_1791735250.png"/>
+          <p:cNvPr id="6" name="삽화:신선도.svg" descr="illust_4517140581493244118_1791735250.png"/>
           <p:cNvPicPr>
             <a:picLocks noChangeAspect="1"/>
           </p:cNvPicPr>
@@ -16811,7 +16811,7 @@
       </p:sp>
       <p:pic>
         <p:nvPicPr>
-          <p:cNvPr id="6" name="삽화:멈춤조건.svg" descr="illust_4727613174368222113_1791735250.png"/>
+          <p:cNvPr id="6" name="삽화:멈춤조건.svg" descr="illust_1938152010007762098_1791735250.png"/>
           <p:cNvPicPr>
             <a:picLocks noChangeAspect="1"/>
           </p:cNvPicPr>
@@ -26396,7 +26396,7 @@
         </p:nvSpPr>
         <p:spPr>
           <a:xfrm>
-            <a:off x="548640" y="1961387"/>
+            <a:off x="548640" y="1627632"/>
             <a:ext cx="11094415" cy="347472"/>
           </a:xfrm>
           <a:prstGeom prst="roundRect">
@@ -26427,7 +26427,7 @@
         </p:nvSpPr>
         <p:spPr>
           <a:xfrm>
-            <a:off x="685800" y="1961387"/>
+            <a:off x="685800" y="1627632"/>
             <a:ext cx="2514600" cy="347472"/>
           </a:xfrm>
           <a:prstGeom prst="rect">
@@ -26466,7 +26466,7 @@
         </p:nvSpPr>
         <p:spPr>
           <a:xfrm>
-            <a:off x="3200400" y="1961387"/>
+            <a:off x="3200400" y="1627632"/>
             <a:ext cx="6248095" cy="347472"/>
           </a:xfrm>
           <a:prstGeom prst="rect">
@@ -26505,7 +26505,7 @@
         </p:nvSpPr>
         <p:spPr>
           <a:xfrm>
-            <a:off x="9448495" y="1961387"/>
+            <a:off x="9448495" y="1627632"/>
             <a:ext cx="2194560" cy="347472"/>
           </a:xfrm>
           <a:prstGeom prst="rect">
@@ -26544,8 +26544,8 @@
         </p:nvSpPr>
         <p:spPr>
           <a:xfrm>
-            <a:off x="548640" y="2395727"/>
-            <a:ext cx="11094415" cy="850392"/>
+            <a:off x="548640" y="2061972"/>
+            <a:ext cx="11094415" cy="656843"/>
           </a:xfrm>
           <a:prstGeom prst="roundRect">
             <a:avLst>
@@ -26575,8 +26575,8 @@
         </p:nvSpPr>
         <p:spPr>
           <a:xfrm>
-            <a:off x="685800" y="2363723"/>
-            <a:ext cx="2514600" cy="914400"/>
+            <a:off x="685800" y="2029968"/>
+            <a:ext cx="2514600" cy="720851"/>
           </a:xfrm>
           <a:prstGeom prst="rect">
             <a:avLst/>
@@ -26614,8 +26614,8 @@
         </p:nvSpPr>
         <p:spPr>
           <a:xfrm>
-            <a:off x="3200400" y="2363723"/>
-            <a:ext cx="6156655" cy="914400"/>
+            <a:off x="3200400" y="2029968"/>
+            <a:ext cx="6156655" cy="720851"/>
           </a:xfrm>
           <a:prstGeom prst="rect">
             <a:avLst/>
@@ -26653,8 +26653,8 @@
         </p:nvSpPr>
         <p:spPr>
           <a:xfrm>
-            <a:off x="9448495" y="2363723"/>
-            <a:ext cx="2103120" cy="914400"/>
+            <a:off x="9448495" y="2029968"/>
+            <a:ext cx="2103120" cy="720851"/>
           </a:xfrm>
           <a:prstGeom prst="rect">
             <a:avLst/>
@@ -26692,8 +26692,8 @@
         </p:nvSpPr>
         <p:spPr>
           <a:xfrm>
-            <a:off x="548640" y="3310127"/>
-            <a:ext cx="11094415" cy="850392"/>
+            <a:off x="548640" y="2782824"/>
+            <a:ext cx="11094415" cy="656843"/>
           </a:xfrm>
           <a:prstGeom prst="roundRect">
             <a:avLst>
@@ -26723,8 +26723,8 @@
         </p:nvSpPr>
         <p:spPr>
           <a:xfrm>
-            <a:off x="685800" y="3278123"/>
-            <a:ext cx="2514600" cy="914400"/>
+            <a:off x="685800" y="2750820"/>
+            <a:ext cx="2514600" cy="720851"/>
           </a:xfrm>
           <a:prstGeom prst="rect">
             <a:avLst/>
@@ -26762,8 +26762,8 @@
         </p:nvSpPr>
         <p:spPr>
           <a:xfrm>
-            <a:off x="3200400" y="3278123"/>
-            <a:ext cx="6156655" cy="914400"/>
+            <a:off x="3200400" y="2750820"/>
+            <a:ext cx="6156655" cy="720851"/>
           </a:xfrm>
           <a:prstGeom prst="rect">
             <a:avLst/>
@@ -26801,8 +26801,8 @@
         </p:nvSpPr>
         <p:spPr>
           <a:xfrm>
-            <a:off x="9448495" y="3278123"/>
-            <a:ext cx="2103120" cy="914400"/>
+            <a:off x="9448495" y="2750820"/>
+            <a:ext cx="2103120" cy="720851"/>
           </a:xfrm>
           <a:prstGeom prst="rect">
             <a:avLst/>
@@ -26840,8 +26840,8 @@
         </p:nvSpPr>
         <p:spPr>
           <a:xfrm>
-            <a:off x="548640" y="4224527"/>
-            <a:ext cx="11094415" cy="850392"/>
+            <a:off x="548640" y="3503676"/>
+            <a:ext cx="11094415" cy="656843"/>
           </a:xfrm>
           <a:prstGeom prst="roundRect">
             <a:avLst>
@@ -26871,8 +26871,8 @@
         </p:nvSpPr>
         <p:spPr>
           <a:xfrm>
-            <a:off x="685800" y="4192523"/>
-            <a:ext cx="2514600" cy="914400"/>
+            <a:off x="685800" y="3471672"/>
+            <a:ext cx="2514600" cy="720851"/>
           </a:xfrm>
           <a:prstGeom prst="rect">
             <a:avLst/>
@@ -26910,8 +26910,8 @@
         </p:nvSpPr>
         <p:spPr>
           <a:xfrm>
-            <a:off x="3200400" y="4192523"/>
-            <a:ext cx="6156655" cy="914400"/>
+            <a:off x="3200400" y="3471672"/>
+            <a:ext cx="6156655" cy="720851"/>
           </a:xfrm>
           <a:prstGeom prst="rect">
             <a:avLst/>
@@ -26949,8 +26949,8 @@
         </p:nvSpPr>
         <p:spPr>
           <a:xfrm>
-            <a:off x="9448495" y="4192523"/>
-            <a:ext cx="2103120" cy="914400"/>
+            <a:off x="9448495" y="3471672"/>
+            <a:ext cx="2103120" cy="720851"/>
           </a:xfrm>
           <a:prstGeom prst="rect">
             <a:avLst/>
@@ -26988,8 +26988,8 @@
         </p:nvSpPr>
         <p:spPr>
           <a:xfrm>
-            <a:off x="548640" y="5138927"/>
-            <a:ext cx="11094415" cy="850392"/>
+            <a:off x="548640" y="4224528"/>
+            <a:ext cx="11094415" cy="656843"/>
           </a:xfrm>
           <a:prstGeom prst="roundRect">
             <a:avLst>
@@ -27019,8 +27019,8 @@
         </p:nvSpPr>
         <p:spPr>
           <a:xfrm>
-            <a:off x="685800" y="5106923"/>
-            <a:ext cx="2514600" cy="914400"/>
+            <a:off x="685800" y="4192524"/>
+            <a:ext cx="2514600" cy="720851"/>
           </a:xfrm>
           <a:prstGeom prst="rect">
             <a:avLst/>
@@ -27058,8 +27058,8 @@
         </p:nvSpPr>
         <p:spPr>
           <a:xfrm>
-            <a:off x="3200400" y="5106923"/>
-            <a:ext cx="6156655" cy="914400"/>
+            <a:off x="3200400" y="4192524"/>
+            <a:ext cx="6156655" cy="720851"/>
           </a:xfrm>
           <a:prstGeom prst="rect">
             <a:avLst/>
@@ -27097,8 +27097,8 @@
         </p:nvSpPr>
         <p:spPr>
           <a:xfrm>
-            <a:off x="9448495" y="5106923"/>
-            <a:ext cx="2103120" cy="914400"/>
+            <a:off x="9448495" y="4192524"/>
+            <a:ext cx="2103120" cy="720851"/>
           </a:xfrm>
           <a:prstGeom prst="rect">
             <a:avLst/>
@@ -27124,6 +27124,302 @@
                 <a:cs typeface="맑은 고딕"/>
               </a:rPr>
               <a:t>여러 출처를 그 자리에 둔 채 연결해 읽는 방식</a:t>
+            </a:r>
+          </a:p>
+        </p:txBody>
+      </p:sp>
+      <p:sp>
+        <p:nvSpPr>
+          <p:cNvPr id="26" name="Rounded Rectangle 25"/>
+          <p:cNvSpPr/>
+          <p:nvPr/>
+        </p:nvSpPr>
+        <p:spPr>
+          <a:xfrm>
+            <a:off x="548640" y="4945380"/>
+            <a:ext cx="11094415" cy="656843"/>
+          </a:xfrm>
+          <a:prstGeom prst="roundRect">
+            <a:avLst>
+              <a:gd name="adj" fmla="val 8000"/>
+            </a:avLst>
+          </a:prstGeom>
+          <a:solidFill>
+            <a:srgbClr val="F3F6F9"/>
+          </a:solidFill>
+          <a:ln>
+            <a:noFill/>
+          </a:ln>
+        </p:spPr>
+        <p:txBody>
+          <a:bodyPr rtlCol="0" anchor="ctr"/>
+          <a:lstStyle/>
+          <a:p>
+            <a:pPr algn="ctr"/>
+          </a:p>
+        </p:txBody>
+      </p:sp>
+      <p:sp>
+        <p:nvSpPr>
+          <p:cNvPr id="27" name="TextBox 26"/>
+          <p:cNvSpPr txBox="1"/>
+          <p:nvPr/>
+        </p:nvSpPr>
+        <p:spPr>
+          <a:xfrm>
+            <a:off x="685800" y="4913376"/>
+            <a:ext cx="2514600" cy="720851"/>
+          </a:xfrm>
+          <a:prstGeom prst="rect">
+            <a:avLst/>
+          </a:prstGeom>
+          <a:noFill/>
+        </p:spPr>
+        <p:txBody>
+          <a:bodyPr wrap="square" anchor="ctr"/>
+          <a:lstStyle/>
+          <a:p>
+            <a:pPr algn="l">
+              <a:lnSpc>
+                <a:spcPct val="110000"/>
+              </a:lnSpc>
+            </a:pPr>
+            <a:r>
+              <a:rPr sz="1600" b="1">
+                <a:solidFill>
+                  <a:srgbClr val="13294B"/>
+                </a:solidFill>
+                <a:latin typeface="맑은 고딕"/>
+                <a:ea typeface="맑은 고딕"/>
+                <a:cs typeface="맑은 고딕"/>
+              </a:rPr>
+              <a:t>RAG</a:t>
+            </a:r>
+          </a:p>
+        </p:txBody>
+      </p:sp>
+      <p:sp>
+        <p:nvSpPr>
+          <p:cNvPr id="28" name="TextBox 27"/>
+          <p:cNvSpPr txBox="1"/>
+          <p:nvPr/>
+        </p:nvSpPr>
+        <p:spPr>
+          <a:xfrm>
+            <a:off x="3200400" y="4913376"/>
+            <a:ext cx="6156655" cy="720851"/>
+          </a:xfrm>
+          <a:prstGeom prst="rect">
+            <a:avLst/>
+          </a:prstGeom>
+          <a:noFill/>
+        </p:spPr>
+        <p:txBody>
+          <a:bodyPr wrap="square" anchor="ctr"/>
+          <a:lstStyle/>
+          <a:p>
+            <a:pPr algn="l">
+              <a:lnSpc>
+                <a:spcPct val="110000"/>
+              </a:lnSpc>
+            </a:pPr>
+            <a:r>
+              <a:rPr sz="1400" b="0">
+                <a:solidFill>
+                  <a:srgbClr val="1F2A3A"/>
+                </a:solidFill>
+                <a:latin typeface="맑은 고딕"/>
+                <a:ea typeface="맑은 고딕"/>
+                <a:cs typeface="맑은 고딕"/>
+              </a:rPr>
+              <a:t>Retrieval-Augmented Generation</a:t>
+            </a:r>
+          </a:p>
+        </p:txBody>
+      </p:sp>
+      <p:sp>
+        <p:nvSpPr>
+          <p:cNvPr id="29" name="TextBox 28"/>
+          <p:cNvSpPr txBox="1"/>
+          <p:nvPr/>
+        </p:nvSpPr>
+        <p:spPr>
+          <a:xfrm>
+            <a:off x="9448495" y="4913376"/>
+            <a:ext cx="2103120" cy="720851"/>
+          </a:xfrm>
+          <a:prstGeom prst="rect">
+            <a:avLst/>
+          </a:prstGeom>
+          <a:noFill/>
+        </p:spPr>
+        <p:txBody>
+          <a:bodyPr wrap="square" anchor="ctr"/>
+          <a:lstStyle/>
+          <a:p>
+            <a:pPr algn="l">
+              <a:lnSpc>
+                <a:spcPct val="110000"/>
+              </a:lnSpc>
+            </a:pPr>
+            <a:r>
+              <a:rPr sz="1250" b="1">
+                <a:solidFill>
+                  <a:srgbClr val="556175"/>
+                </a:solidFill>
+                <a:latin typeface="맑은 고딕"/>
+                <a:ea typeface="맑은 고딕"/>
+                <a:cs typeface="맑은 고딕"/>
+              </a:rPr>
+              <a:t>문서 조각을 찾아 모델에 함께 읽히는 방식</a:t>
+            </a:r>
+          </a:p>
+        </p:txBody>
+      </p:sp>
+      <p:sp>
+        <p:nvSpPr>
+          <p:cNvPr id="30" name="Rounded Rectangle 29"/>
+          <p:cNvSpPr/>
+          <p:nvPr/>
+        </p:nvSpPr>
+        <p:spPr>
+          <a:xfrm>
+            <a:off x="548640" y="5666232"/>
+            <a:ext cx="11094415" cy="656843"/>
+          </a:xfrm>
+          <a:prstGeom prst="roundRect">
+            <a:avLst>
+              <a:gd name="adj" fmla="val 8000"/>
+            </a:avLst>
+          </a:prstGeom>
+          <a:solidFill>
+            <a:srgbClr val="F3F6F9"/>
+          </a:solidFill>
+          <a:ln>
+            <a:noFill/>
+          </a:ln>
+        </p:spPr>
+        <p:txBody>
+          <a:bodyPr rtlCol="0" anchor="ctr"/>
+          <a:lstStyle/>
+          <a:p>
+            <a:pPr algn="ctr"/>
+          </a:p>
+        </p:txBody>
+      </p:sp>
+      <p:sp>
+        <p:nvSpPr>
+          <p:cNvPr id="31" name="TextBox 30"/>
+          <p:cNvSpPr txBox="1"/>
+          <p:nvPr/>
+        </p:nvSpPr>
+        <p:spPr>
+          <a:xfrm>
+            <a:off x="685800" y="5634228"/>
+            <a:ext cx="2514600" cy="720851"/>
+          </a:xfrm>
+          <a:prstGeom prst="rect">
+            <a:avLst/>
+          </a:prstGeom>
+          <a:noFill/>
+        </p:spPr>
+        <p:txBody>
+          <a:bodyPr wrap="square" anchor="ctr"/>
+          <a:lstStyle/>
+          <a:p>
+            <a:pPr algn="l">
+              <a:lnSpc>
+                <a:spcPct val="110000"/>
+              </a:lnSpc>
+            </a:pPr>
+            <a:r>
+              <a:rPr sz="1600" b="1">
+                <a:solidFill>
+                  <a:srgbClr val="13294B"/>
+                </a:solidFill>
+                <a:latin typeface="맑은 고딕"/>
+                <a:ea typeface="맑은 고딕"/>
+                <a:cs typeface="맑은 고딕"/>
+              </a:rPr>
+              <a:t>JSON</a:t>
+            </a:r>
+          </a:p>
+        </p:txBody>
+      </p:sp>
+      <p:sp>
+        <p:nvSpPr>
+          <p:cNvPr id="32" name="TextBox 31"/>
+          <p:cNvSpPr txBox="1"/>
+          <p:nvPr/>
+        </p:nvSpPr>
+        <p:spPr>
+          <a:xfrm>
+            <a:off x="3200400" y="5634228"/>
+            <a:ext cx="6156655" cy="720851"/>
+          </a:xfrm>
+          <a:prstGeom prst="rect">
+            <a:avLst/>
+          </a:prstGeom>
+          <a:noFill/>
+        </p:spPr>
+        <p:txBody>
+          <a:bodyPr wrap="square" anchor="ctr"/>
+          <a:lstStyle/>
+          <a:p>
+            <a:pPr algn="l">
+              <a:lnSpc>
+                <a:spcPct val="110000"/>
+              </a:lnSpc>
+            </a:pPr>
+            <a:r>
+              <a:rPr sz="1400" b="0">
+                <a:solidFill>
+                  <a:srgbClr val="1F2A3A"/>
+                </a:solidFill>
+                <a:latin typeface="맑은 고딕"/>
+                <a:ea typeface="맑은 고딕"/>
+                <a:cs typeface="맑은 고딕"/>
+              </a:rPr>
+              <a:t>JavaScript Object Notation</a:t>
+            </a:r>
+          </a:p>
+        </p:txBody>
+      </p:sp>
+      <p:sp>
+        <p:nvSpPr>
+          <p:cNvPr id="33" name="TextBox 32"/>
+          <p:cNvSpPr txBox="1"/>
+          <p:nvPr/>
+        </p:nvSpPr>
+        <p:spPr>
+          <a:xfrm>
+            <a:off x="9448495" y="5634228"/>
+            <a:ext cx="2103120" cy="720851"/>
+          </a:xfrm>
+          <a:prstGeom prst="rect">
+            <a:avLst/>
+          </a:prstGeom>
+          <a:noFill/>
+        </p:spPr>
+        <p:txBody>
+          <a:bodyPr wrap="square" anchor="ctr"/>
+          <a:lstStyle/>
+          <a:p>
+            <a:pPr algn="l">
+              <a:lnSpc>
+                <a:spcPct val="110000"/>
+              </a:lnSpc>
+            </a:pPr>
+            <a:r>
+              <a:rPr sz="1250" b="1">
+                <a:solidFill>
+                  <a:srgbClr val="556175"/>
+                </a:solidFill>
+                <a:latin typeface="맑은 고딕"/>
+                <a:ea typeface="맑은 고딕"/>
+                <a:cs typeface="맑은 고딕"/>
+              </a:rPr>
+              <a:t>추천안을 제출하는 형식</a:t>
             </a:r>
           </a:p>
         </p:txBody>
@@ -30941,7 +31237,7 @@
       </p:sp>
       <p:pic>
         <p:nvPicPr>
-          <p:cNvPr id="6" name="삽화:경보에서승인까지.svg" descr="illust_6031403211073014174_1791735250.png"/>
+          <p:cNvPr id="6" name="삽화:경보에서승인까지.svg" descr="illust_6812881924996224174_1791735250.png"/>
           <p:cNvPicPr>
             <a:picLocks noChangeAspect="1"/>
           </p:cNvPicPr>
@@ -33065,7 +33361,7 @@
                 <a:ea typeface="맑은 고딕"/>
                 <a:cs typeface="맑은 고딕"/>
               </a:rPr>
-              <a:t>RAG는 질문과 가까운 문서 조각을 찾아 모델에 함께 넣어, 모델이 학습하지 않은 문서의 내용으로 답하게 한다.</a:t>
+              <a:t>RAG(Retrieval-Augmented Generation)는 질문과 가까운 문서 조각을 찾아 모델에 함께 넣어 그 내용으로 답하게 한다.</a:t>
             </a:r>
           </a:p>
         </p:txBody>

--- a/docs/교재/실전반_오프라인/04회차/실전반_오프라인_04회차.pptx
+++ b/docs/교재/실전반_오프라인/04회차/실전반_오프라인_04회차.pptx
@@ -542,7 +542,7 @@
           <a:lstStyle/>
           <a:p>
             <a:r>
-              <a:t>앞 회차까지는 판단의 재료인 지식과 규칙을 만들었습니다. 오늘은 그 재료로 실제로 일하는 에이전트를 다룹니다. 이론에서 원리를 본 뒤 네 실습에서 에이전트를 구성하고, 원인을 추론하게 하고, 복합 조건과 여러 출처로 넓혀 갑니다. 이 네 가지를 자료 없이 자신의 말로 설명할 수 있는지가 오늘의 기준입니다.</a:t>
+              <a:t>앞 회차까지는 판단의 재료인 지식과 규칙을 만들었습니다. 오늘은 그 재료로 실제로 일하는 에이전트를 다룹니다. 이론에서 원리를 본 뒤 네 실습에서 에이전트를 구성하고, 원인을 추론하게 하고, 복합 조건과 여러 출처로 넓혀 갑니다. 네 목표 가운데 넷째, 곧 언제 멈추고 무엇을 남기는지가 에이전트를 믿고 쓰는 데 가장 중요합니다.</a:t>
             </a:r>
           </a:p>
         </p:txBody>
@@ -1032,7 +1032,7 @@
           <a:lstStyle/>
           <a:p>
             <a:r>
-              <a:t>네 정보원 가운데 온톨로지와 SOP는 같은 지식 그래프에 들어 있습니다. 앞 회차까지 만든 그래프입니다. 에이전트는 고장 유형에서 CAUSES를 거슬러 원인 후보 셋을, MITIGATED_BY를 따라 조치 방법을 얻었습니다. 후보마다 붙은 사전 확률은 아직 값을 보지 않은 상태의 가능성이며, 어느 후보가 맞는지는 값을 읽어야 정해집니다.</a:t>
+              <a:t>네 정보원 가운데 온톨로지와 SOP는 같은 지식 그래프에 들어 있습니다. 앞 회차까지 만든 그래프입니다. 에이전트는 고장 유형에서 CAUSES를 거슬러 원인 후보 셋을, MITIGATED_BY를 따라 조치 방법을 얻었습니다. 그래프가 알려 주는 것은 후보까지이며, 셋 가운데 어느 것이 맞는지는 값을 읽어야 정해집니다.</a:t>
             </a:r>
           </a:p>
         </p:txBody>
@@ -1172,7 +1172,7 @@
           <a:lstStyle/>
           <a:p>
             <a:r>
-              <a:t>판단에 쓸 값은 한 시스템에만 있지 않습니다. 설비의 측정값은 시계열 DB에, 정비와 부품의 기록은 업무 DB에 있습니다. 이런 데이터를 한곳으로 옮겨 모으지 않고 출처에 둔 채 연결해 함께 읽는 방식을 데이터 패브릭이라고 합니다. 읽은 값마다 출처와 읽은 시각을 붙이고, 한 출처가 실패하면 그 사실을 함께 알립니다.</a:t>
+              <a:t>정보원이 여러 시스템에 나뉘어 있을 때 쓰는 개념 하나를 봅니다. 설비의 측정값은 시계열 DB에, 정비와 부품의 기록은 업무 DB에 있습니다. 이런 데이터를 한곳으로 옮겨 모으지 않고 출처에 둔 채 연결해 함께 읽는 방식을 데이터 패브릭이라고 합니다. 읽은 값마다 출처와 읽은 시각을 붙이고, 한 출처가 실패하면 읽힌 값만 주면서 그 사실을 함께 알립니다.</a:t>
             </a:r>
           </a:p>
         </p:txBody>
@@ -2362,7 +2362,7 @@
           <a:lstStyle/>
           <a:p>
             <a:r>
-              <a:t>정답보다 판단 기준이 중요합니다. 첫 문항의 4번은 문서를 찾아 읽어도 지금의 값은 문서에 없다는 점을 놓친 것입니다. 둘째 문항의 3번은 같은 일을 방법을 바꾸어 다시 한 경우에 해당하는 말이며 이 장면과는 다릅니다. 셋째 문항의 1번은 묵은 값을, 2번은 실패를 0으로, 3번은 가능성을 확인으로 바꾸어 쓴 것입니다.</a:t>
+              <a:t>첫 문항의 4번은 문서를 찾아 읽어도 지금의 값은 문서에 없다는 점을 놓친 것입니다. 둘째 문항의 3번은 같은 일을 방법을 바꾸어 다시 한 경우에 해당하는 말이며 이 장면과는 다릅니다. 셋째 문항의 1번은 묵은 값을, 2번은 실패를 0으로, 3번은 후보를 확인된 원인으로 바꾸어 쓴 것입니다.</a:t>
             </a:r>
           </a:p>
         </p:txBody>
@@ -2782,7 +2782,7 @@
           <a:lstStyle/>
           <a:p>
             <a:r>
-              <a:t>에이전트 하나는 이 항목들로 정의됩니다. 쿨러 사건을 맡은 냉각 긴급 대응 에이전트의 값입니다. 목표는 무엇을 이루어야 끝나는지를, 도구는 무엇을 쓸 수 있는지를 정합니다. 업무 지침은 에이전트 스킬이라는 파일로 주며, 그 형식은 다음 회차에서 다룹니다.</a:t>
+              <a:t>에이전트 하나는 이 항목들로 정의됩니다. 쿨러 사건을 맡은 냉각 긴급 대응 에이전트의 값입니다. 목표는 무엇을 이루어야 끝나는지를, 도구는 무엇을 쓸 수 있는지를 정합니다. 목표 칸은 에이전트에 적힌 문장을 이 수업의 낱말로 줄여 옮긴 요지입니다. 업무 지침은 에이전트 스킬이라는 파일로 주며, 그 형식은 다음 회차에서 다룹니다.</a:t>
             </a:r>
           </a:p>
         </p:txBody>
@@ -7268,7 +7268,7 @@
       </p:sp>
       <p:pic>
         <p:nvPicPr>
-          <p:cNvPr id="6" name="삽화:세요소.svg" descr="illust_2620394902018578088_1791735250.png"/>
+          <p:cNvPr id="6" name="삽화:세요소.svg" descr="illust_2828753860784203592_1791735250.png"/>
           <p:cNvPicPr>
             <a:picLocks noChangeAspect="1"/>
           </p:cNvPicPr>
@@ -8156,7 +8156,7 @@
                 <a:ea typeface="맑은 고딕"/>
                 <a:cs typeface="맑은 고딕"/>
               </a:rPr>
-              <a:t>쿨러 성능 저하 경보의 원인을 진단하고, 냉각 조치 후보를 규정과 회사 목표로 견주어 추천 하나와 뒤진 대안을 올린다</a:t>
+              <a:t>요지: 쿨러 성능 저하 경보의 원인을 진단하고, 냉각 조치 후보를 규정과 회사 목표로 견주어 추천 하나와 뒤진 대안을 올린다</a:t>
             </a:r>
           </a:p>
         </p:txBody>
@@ -9390,7 +9390,7 @@
       </p:sp>
       <p:pic>
         <p:nvPicPr>
-          <p:cNvPr id="6" name="삽화:실행고리.svg" descr="illust_5875319185426250523_1791735250.png"/>
+          <p:cNvPr id="6" name="삽화:실행고리.svg" descr="illust_5084994355589885470_1791735250.png"/>
           <p:cNvPicPr>
             <a:picLocks noChangeAspect="1"/>
           </p:cNvPicPr>
@@ -11377,7 +11377,7 @@
                 <a:ea typeface="맑은 고딕"/>
                 <a:cs typeface="맑은 고딕"/>
               </a:rPr>
-              <a:t>          11:13:09</a:t>
+              <a:t>          </a:t>
             </a:r>
             <a:r>
               <a:rPr sz="1300" b="0">
@@ -11388,7 +11388,7 @@
                 <a:ea typeface="맑은 고딕"/>
                 <a:cs typeface="맑은 고딕"/>
               </a:rPr>
-              <a:t>부터</a:t>
+              <a:t>시작부터</a:t>
             </a:r>
             <a:r>
               <a:rPr sz="1300" b="0">
@@ -12594,7 +12594,7 @@
       </p:sp>
       <p:pic>
         <p:nvPicPr>
-          <p:cNvPr id="6" name="삽화:정보원.svg" descr="illust_6171456689795612062_1791735250.png"/>
+          <p:cNvPr id="6" name="삽화:정보원.svg" descr="illust_6078356572674353610_1791735250.png"/>
           <p:cNvPicPr>
             <a:picLocks noChangeAspect="1"/>
           </p:cNvPicPr>
@@ -13189,24 +13189,6 @@
               <a:t>원인</a:t>
             </a:r>
           </a:p>
-          <a:p>
-            <a:pPr algn="ctr">
-              <a:lnSpc>
-                <a:spcPct val="110000"/>
-              </a:lnSpc>
-            </a:pPr>
-            <a:r>
-              <a:rPr sz="1100" b="0">
-                <a:solidFill>
-                  <a:srgbClr val="556175"/>
-                </a:solidFill>
-                <a:latin typeface="맑은 고딕"/>
-                <a:ea typeface="맑은 고딕"/>
-                <a:cs typeface="맑은 고딕"/>
-              </a:rPr>
-              <a:t>사전 확률 0.6</a:t>
-            </a:r>
-          </a:p>
         </p:txBody>
       </p:sp>
       <p:sp>
@@ -13295,24 +13277,6 @@
               <a:t>원인</a:t>
             </a:r>
           </a:p>
-          <a:p>
-            <a:pPr algn="ctr">
-              <a:lnSpc>
-                <a:spcPct val="110000"/>
-              </a:lnSpc>
-            </a:pPr>
-            <a:r>
-              <a:rPr sz="1100" b="0">
-                <a:solidFill>
-                  <a:srgbClr val="556175"/>
-                </a:solidFill>
-                <a:latin typeface="맑은 고딕"/>
-                <a:ea typeface="맑은 고딕"/>
-                <a:cs typeface="맑은 고딕"/>
-              </a:rPr>
-              <a:t>사전 확률 0.2</a:t>
-            </a:r>
-          </a:p>
         </p:txBody>
       </p:sp>
       <p:sp>
@@ -13399,24 +13363,6 @@
                 <a:cs typeface="맑은 고딕"/>
               </a:rPr>
               <a:t>원인</a:t>
-            </a:r>
-          </a:p>
-          <a:p>
-            <a:pPr algn="ctr">
-              <a:lnSpc>
-                <a:spcPct val="110000"/>
-              </a:lnSpc>
-            </a:pPr>
-            <a:r>
-              <a:rPr sz="1100" b="0">
-                <a:solidFill>
-                  <a:srgbClr val="556175"/>
-                </a:solidFill>
-                <a:latin typeface="맑은 고딕"/>
-                <a:ea typeface="맑은 고딕"/>
-                <a:cs typeface="맑은 고딕"/>
-              </a:rPr>
-              <a:t>사전 확률 0.2</a:t>
             </a:r>
           </a:p>
         </p:txBody>
@@ -15213,7 +15159,7 @@
       </p:sp>
       <p:pic>
         <p:nvPicPr>
-          <p:cNvPr id="6" name="삽화:도구경유.svg" descr="illust_2211609066225757847_1791735250.png"/>
+          <p:cNvPr id="6" name="삽화:도구경유.svg" descr="illust_6362551673273628390_1791735250.png"/>
           <p:cNvPicPr>
             <a:picLocks noChangeAspect="1"/>
           </p:cNvPicPr>
@@ -15712,7 +15658,7 @@
                 <a:ea typeface="맑은 고딕"/>
                 <a:cs typeface="맑은 고딕"/>
               </a:rPr>
-              <a:t>여러 시스템에 흩어진 기록을 한 출력으로 묶을 때에는 값마다 출처와 읽은 시각이 붙어 있어야 그 출력의 근거가 남는다.</a:t>
+              <a:t>데이터 패브릭은 여러 시스템의 데이터를 출처에 둔 채 함께 읽는 방식이며, 값마다 출처와 읽은 시각을 붙인다.</a:t>
             </a:r>
           </a:p>
         </p:txBody>
@@ -16384,7 +16330,7 @@
       </p:sp>
       <p:pic>
         <p:nvPicPr>
-          <p:cNvPr id="6" name="삽화:신선도.svg" descr="illust_4517140581493244118_1791735250.png"/>
+          <p:cNvPr id="6" name="삽화:신선도.svg" descr="illust_4050983750405651206_1791735250.png"/>
           <p:cNvPicPr>
             <a:picLocks noChangeAspect="1"/>
           </p:cNvPicPr>
@@ -16811,7 +16757,7 @@
       </p:sp>
       <p:pic>
         <p:nvPicPr>
-          <p:cNvPr id="6" name="삽화:멈춤조건.svg" descr="illust_1938152010007762098_1791735250.png"/>
+          <p:cNvPr id="6" name="삽화:멈춤조건.svg" descr="illust_725550645743326304_1791735250.png"/>
           <p:cNvPicPr>
             <a:picLocks noChangeAspect="1"/>
           </p:cNvPicPr>
@@ -23009,7 +22955,7 @@
                 <a:ea typeface="맑은 고딕"/>
                 <a:cs typeface="맑은 고딕"/>
               </a:rPr>
-              <a:t>이 실습을 마치면 후보 원인과 증거, 다음 점검 순서를 담은 점검 계획과 그 계획에 쓴 근거가 파일로 남는다.</a:t>
+              <a:t>이 실습의 결과물은 후보 원인과 증거, 다음 점검 순서를 담은 점검 계획과 그 계획에 쓴 근거 파일이다.</a:t>
             </a:r>
           </a:p>
         </p:txBody>
@@ -30134,7 +30080,7 @@
                 <a:ea typeface="맑은 고딕"/>
                 <a:cs typeface="맑은 고딕"/>
               </a:rPr>
-              <a:t>사전 확률이 가장 높은 쿨러 핀 오염을 확인된 원인으로 적는다</a:t>
+              <a:t>원인 후보에 올라 있는 쿨러 핀 오염을 확인된 원인으로 적는다</a:t>
             </a:r>
           </a:p>
         </p:txBody>
@@ -31237,7 +31183,7 @@
       </p:sp>
       <p:pic>
         <p:nvPicPr>
-          <p:cNvPr id="6" name="삽화:경보에서승인까지.svg" descr="illust_6812881924996224174_1791735250.png"/>
+          <p:cNvPr id="6" name="삽화:경보에서승인까지.svg" descr="illust_8482421049750214847_1791735250.png"/>
           <p:cNvPicPr>
             <a:picLocks noChangeAspect="1"/>
           </p:cNvPicPr>

--- a/docs/교재/실전반_오프라인/04회차/실전반_오프라인_04회차.pptx
+++ b/docs/교재/실전반_오프라인/04회차/실전반_오프라인_04회차.pptx
@@ -1872,7 +1872,7 @@
           <a:lstStyle/>
           <a:p>
             <a:r>
-              <a:t>셋째 실습에서는 앞 실습의 에이전트에 더 어려운 입력을 줍니다. 센서 증거가 서로 엇갈리는 경우, 필요한 입력이 빠진 경우, 품질 이슈가 섞인 경우입니다. 에이전트는 기준에 맞은 것만 확인된 원인으로 적고, 확인하지 못한 후보는 가설로 표시해야 합니다. 끝나면 가설을 가리는 데 필요한 추가 점검까지 담은 점검 계획이 남습니다.</a:t>
+              <a:t>셋째 실습에서는 앞 실습의 에이전트에 더 어려운 입력을 줍니다. 센서 증거가 서로 엇갈리는 경우, 필요한 입력이 빠진 경우, 제품의 품질 문제 곧 불량 로트가 함께 있는 경우입니다. 에이전트는 기준에 맞은 것만 확인된 원인으로 적고, 확인하지 못한 후보는 가설로 표시해야 합니다. 끝나면 가설을 가리는 데 필요한 추가 점검까지 담은 점검 계획이 남습니다.</a:t>
             </a:r>
           </a:p>
         </p:txBody>
@@ -7268,7 +7268,7 @@
       </p:sp>
       <p:pic>
         <p:nvPicPr>
-          <p:cNvPr id="6" name="삽화:세요소.svg" descr="illust_2828753860784203592_1791735250.png"/>
+          <p:cNvPr id="6" name="삽화:세요소.svg" descr="illust_1505268244361238395_1791735250.png"/>
           <p:cNvPicPr>
             <a:picLocks noChangeAspect="1"/>
           </p:cNvPicPr>
@@ -9390,7 +9390,7 @@
       </p:sp>
       <p:pic>
         <p:nvPicPr>
-          <p:cNvPr id="6" name="삽화:실행고리.svg" descr="illust_5084994355589885470_1791735250.png"/>
+          <p:cNvPr id="6" name="삽화:실행고리.svg" descr="illust_3213244933606313500_1791735250.png"/>
           <p:cNvPicPr>
             <a:picLocks noChangeAspect="1"/>
           </p:cNvPicPr>
@@ -12594,7 +12594,7 @@
       </p:sp>
       <p:pic>
         <p:nvPicPr>
-          <p:cNvPr id="6" name="삽화:정보원.svg" descr="illust_6078356572674353610_1791735250.png"/>
+          <p:cNvPr id="6" name="삽화:정보원.svg" descr="illust_7330296551274853820_1791735250.png"/>
           <p:cNvPicPr>
             <a:picLocks noChangeAspect="1"/>
           </p:cNvPicPr>
@@ -15159,7 +15159,7 @@
       </p:sp>
       <p:pic>
         <p:nvPicPr>
-          <p:cNvPr id="6" name="삽화:도구경유.svg" descr="illust_6362551673273628390_1791735250.png"/>
+          <p:cNvPr id="6" name="삽화:도구경유.svg" descr="illust_5095950272148128308_1791735250.png"/>
           <p:cNvPicPr>
             <a:picLocks noChangeAspect="1"/>
           </p:cNvPicPr>
@@ -16330,7 +16330,7 @@
       </p:sp>
       <p:pic>
         <p:nvPicPr>
-          <p:cNvPr id="6" name="삽화:신선도.svg" descr="illust_4050983750405651206_1791735250.png"/>
+          <p:cNvPr id="6" name="삽화:신선도.svg" descr="illust_6882843633699982963_1791735250.png"/>
           <p:cNvPicPr>
             <a:picLocks noChangeAspect="1"/>
           </p:cNvPicPr>
@@ -16757,7 +16757,7 @@
       </p:sp>
       <p:pic>
         <p:nvPicPr>
-          <p:cNvPr id="6" name="삽화:멈춤조건.svg" descr="illust_725550645743326304_1791735250.png"/>
+          <p:cNvPr id="6" name="삽화:멈춤조건.svg" descr="illust_8585131145586572732_1791735250.png"/>
           <p:cNvPicPr>
             <a:picLocks noChangeAspect="1"/>
           </p:cNvPicPr>
@@ -24068,7 +24068,7 @@
                 <a:ea typeface="맑은 고딕"/>
                 <a:cs typeface="맑은 고딕"/>
               </a:rPr>
-              <a:t>증거가 엇갈리거나 입력이 빠진 경우에도 가설과 확인된 근거를 나누어 내도록 에이전트를 넓힌다</a:t>
+              <a:t>증거가 엇갈리거나 입력이 빠지거나 제품의 품질 문제(불량 로트)가 겹쳐도 가설과 확인된 근거를 나누어 낸다</a:t>
             </a:r>
           </a:p>
         </p:txBody>
@@ -24253,8 +24253,8 @@
         </p:nvSpPr>
         <p:spPr>
           <a:xfrm>
-            <a:off x="548640" y="2383726"/>
-            <a:ext cx="2567863" cy="3215258"/>
+            <a:off x="548640" y="2279141"/>
+            <a:ext cx="2567863" cy="3424428"/>
           </a:xfrm>
           <a:prstGeom prst="roundRect">
             <a:avLst>
@@ -24286,7 +24286,7 @@
         </p:nvSpPr>
         <p:spPr>
           <a:xfrm>
-            <a:off x="777240" y="2584894"/>
+            <a:off x="777240" y="2480310"/>
             <a:ext cx="731520" cy="731520"/>
           </a:xfrm>
           <a:prstGeom prst="ellipse">
@@ -24323,7 +24323,7 @@
         </p:blipFill>
         <p:spPr>
           <a:xfrm>
-            <a:off x="930859" y="2738513"/>
+            <a:off x="930859" y="2633929"/>
             <a:ext cx="424281" cy="424281"/>
           </a:xfrm>
           <a:prstGeom prst="rect">
@@ -24339,8 +24339,8 @@
         </p:nvSpPr>
         <p:spPr>
           <a:xfrm>
-            <a:off x="713232" y="3407854"/>
-            <a:ext cx="2238679" cy="1688210"/>
+            <a:off x="713232" y="3303270"/>
+            <a:ext cx="2238679" cy="1897380"/>
           </a:xfrm>
           <a:prstGeom prst="rect">
             <a:avLst/>
@@ -24402,7 +24402,7 @@
         </p:nvSpPr>
         <p:spPr>
           <a:xfrm>
-            <a:off x="777240" y="5169217"/>
+            <a:off x="777240" y="5273802"/>
             <a:ext cx="822960" cy="292608"/>
           </a:xfrm>
           <a:prstGeom prst="roundRect">
@@ -24433,7 +24433,7 @@
         </p:nvSpPr>
         <p:spPr>
           <a:xfrm>
-            <a:off x="777240" y="5169217"/>
+            <a:off x="777240" y="5273802"/>
             <a:ext cx="822960" cy="292608"/>
           </a:xfrm>
           <a:prstGeom prst="rect">
@@ -24472,8 +24472,8 @@
         </p:nvSpPr>
         <p:spPr>
           <a:xfrm>
-            <a:off x="3390823" y="2383726"/>
-            <a:ext cx="2567863" cy="3215258"/>
+            <a:off x="3390823" y="2279141"/>
+            <a:ext cx="2567863" cy="3424428"/>
           </a:xfrm>
           <a:prstGeom prst="roundRect">
             <a:avLst>
@@ -24505,7 +24505,7 @@
         </p:nvSpPr>
         <p:spPr>
           <a:xfrm>
-            <a:off x="3619423" y="2584894"/>
+            <a:off x="3619423" y="2480310"/>
             <a:ext cx="731520" cy="731520"/>
           </a:xfrm>
           <a:prstGeom prst="ellipse">
@@ -24542,7 +24542,7 @@
         </p:blipFill>
         <p:spPr>
           <a:xfrm>
-            <a:off x="3773043" y="2738513"/>
+            <a:off x="3773043" y="2633929"/>
             <a:ext cx="424281" cy="424281"/>
           </a:xfrm>
           <a:prstGeom prst="rect">
@@ -24558,8 +24558,8 @@
         </p:nvSpPr>
         <p:spPr>
           <a:xfrm>
-            <a:off x="3555415" y="3407854"/>
-            <a:ext cx="2238679" cy="1688210"/>
+            <a:off x="3555415" y="3303270"/>
+            <a:ext cx="2238679" cy="1897380"/>
           </a:xfrm>
           <a:prstGeom prst="rect">
             <a:avLst/>
@@ -24587,7 +24587,7 @@
                 <a:ea typeface="맑은 고딕"/>
                 <a:cs typeface="맑은 고딕"/>
               </a:rPr>
-              <a:t>빠진 입력과 품질 이슈</a:t>
+              <a:t>빠진 입력과 제품 품질 문제</a:t>
             </a:r>
           </a:p>
           <a:p>
@@ -24608,7 +24608,7 @@
                 <a:ea typeface="맑은 고딕"/>
                 <a:cs typeface="맑은 고딕"/>
               </a:rPr>
-              <a:t>필요한 값이 비었거나 품질 이슈가 함께 있는 경우를 준다</a:t>
+              <a:t>필요한 값이 비었거나 제품의 품질 문제(불량 로트)가 함께 있는 경우를 준다</a:t>
             </a:r>
           </a:p>
         </p:txBody>
@@ -24621,8 +24621,8 @@
         </p:nvSpPr>
         <p:spPr>
           <a:xfrm>
-            <a:off x="3619423" y="5169217"/>
-            <a:ext cx="822960" cy="292608"/>
+            <a:off x="3619423" y="5273802"/>
+            <a:ext cx="1219199" cy="292608"/>
           </a:xfrm>
           <a:prstGeom prst="roundRect">
             <a:avLst>
@@ -24652,8 +24652,8 @@
         </p:nvSpPr>
         <p:spPr>
           <a:xfrm>
-            <a:off x="3619423" y="5169217"/>
-            <a:ext cx="822960" cy="292608"/>
+            <a:off x="3619423" y="5273802"/>
+            <a:ext cx="1219199" cy="292608"/>
           </a:xfrm>
           <a:prstGeom prst="rect">
             <a:avLst/>
@@ -24678,7 +24678,7 @@
                 <a:ea typeface="맑은 고딕"/>
                 <a:cs typeface="맑은 고딕"/>
               </a:rPr>
-              <a:t>누락</a:t>
+              <a:t>누락 · 불량</a:t>
             </a:r>
           </a:p>
         </p:txBody>
@@ -24691,8 +24691,8 @@
         </p:nvSpPr>
         <p:spPr>
           <a:xfrm>
-            <a:off x="6233007" y="2383726"/>
-            <a:ext cx="2567863" cy="3215258"/>
+            <a:off x="6233007" y="2279141"/>
+            <a:ext cx="2567863" cy="3424428"/>
           </a:xfrm>
           <a:prstGeom prst="roundRect">
             <a:avLst>
@@ -24724,7 +24724,7 @@
         </p:nvSpPr>
         <p:spPr>
           <a:xfrm>
-            <a:off x="6461607" y="2584894"/>
+            <a:off x="6461607" y="2480310"/>
             <a:ext cx="731520" cy="731520"/>
           </a:xfrm>
           <a:prstGeom prst="ellipse">
@@ -24761,7 +24761,7 @@
         </p:blipFill>
         <p:spPr>
           <a:xfrm>
-            <a:off x="6615226" y="2738513"/>
+            <a:off x="6615226" y="2633929"/>
             <a:ext cx="424281" cy="424281"/>
           </a:xfrm>
           <a:prstGeom prst="rect">
@@ -24777,8 +24777,8 @@
         </p:nvSpPr>
         <p:spPr>
           <a:xfrm>
-            <a:off x="6397599" y="3407854"/>
-            <a:ext cx="2238679" cy="1688210"/>
+            <a:off x="6397599" y="3303270"/>
+            <a:ext cx="2238679" cy="1897380"/>
           </a:xfrm>
           <a:prstGeom prst="rect">
             <a:avLst/>
@@ -24840,7 +24840,7 @@
         </p:nvSpPr>
         <p:spPr>
           <a:xfrm>
-            <a:off x="6461607" y="5169217"/>
+            <a:off x="6461607" y="5273802"/>
             <a:ext cx="822960" cy="292608"/>
           </a:xfrm>
           <a:prstGeom prst="roundRect">
@@ -24871,7 +24871,7 @@
         </p:nvSpPr>
         <p:spPr>
           <a:xfrm>
-            <a:off x="6461607" y="5169217"/>
+            <a:off x="6461607" y="5273802"/>
             <a:ext cx="822960" cy="292608"/>
           </a:xfrm>
           <a:prstGeom prst="rect">
@@ -24910,8 +24910,8 @@
         </p:nvSpPr>
         <p:spPr>
           <a:xfrm>
-            <a:off x="9075191" y="2383726"/>
-            <a:ext cx="2567863" cy="3215258"/>
+            <a:off x="9075191" y="2279141"/>
+            <a:ext cx="2567863" cy="3424428"/>
           </a:xfrm>
           <a:prstGeom prst="roundRect">
             <a:avLst>
@@ -24943,7 +24943,7 @@
         </p:nvSpPr>
         <p:spPr>
           <a:xfrm>
-            <a:off x="9303791" y="2584894"/>
+            <a:off x="9303791" y="2480310"/>
             <a:ext cx="731520" cy="731520"/>
           </a:xfrm>
           <a:prstGeom prst="ellipse">
@@ -24980,7 +24980,7 @@
         </p:blipFill>
         <p:spPr>
           <a:xfrm>
-            <a:off x="9457410" y="2738513"/>
+            <a:off x="9457410" y="2633929"/>
             <a:ext cx="424281" cy="424281"/>
           </a:xfrm>
           <a:prstGeom prst="rect">
@@ -24996,8 +24996,8 @@
         </p:nvSpPr>
         <p:spPr>
           <a:xfrm>
-            <a:off x="9239783" y="3407854"/>
-            <a:ext cx="2238679" cy="1688210"/>
+            <a:off x="9239783" y="3303270"/>
+            <a:ext cx="2238679" cy="1897380"/>
           </a:xfrm>
           <a:prstGeom prst="rect">
             <a:avLst/>
@@ -25059,7 +25059,7 @@
         </p:nvSpPr>
         <p:spPr>
           <a:xfrm>
-            <a:off x="9303791" y="5169217"/>
+            <a:off x="9303791" y="5273802"/>
             <a:ext cx="1021080" cy="292608"/>
           </a:xfrm>
           <a:prstGeom prst="roundRect">
@@ -25090,7 +25090,7 @@
         </p:nvSpPr>
         <p:spPr>
           <a:xfrm>
-            <a:off x="9303791" y="5169217"/>
+            <a:off x="9303791" y="5273802"/>
             <a:ext cx="1021080" cy="292608"/>
           </a:xfrm>
           <a:prstGeom prst="rect">
@@ -27537,7 +27537,7 @@
                 <a:ea typeface="맑은 고딕"/>
                 <a:cs typeface="맑은 고딕"/>
               </a:rPr>
-              <a:t>배운 내용을 바탕으로 정답을 맞춰보세요.</a:t>
+              <a:t>배운 내용을 바탕으로 정답을 맞혀 보세요.</a:t>
             </a:r>
           </a:p>
         </p:txBody>
@@ -31183,7 +31183,7 @@
       </p:sp>
       <p:pic>
         <p:nvPicPr>
-          <p:cNvPr id="6" name="삽화:경보에서승인까지.svg" descr="illust_8482421049750214847_1791735250.png"/>
+          <p:cNvPr id="6" name="삽화:경보에서승인까지.svg" descr="illust_8277667436112678899_1791735250.png"/>
           <p:cNvPicPr>
             <a:picLocks noChangeAspect="1"/>
           </p:cNvPicPr>

--- a/docs/교재/실전반_오프라인/04회차/실전반_오프라인_04회차.pptx
+++ b/docs/교재/실전반_오프라인/04회차/실전반_오프라인_04회차.pptx
@@ -7268,7 +7268,7 @@
       </p:sp>
       <p:pic>
         <p:nvPicPr>
-          <p:cNvPr id="6" name="삽화:세요소.svg" descr="illust_1505268244361238395_1791735250.png"/>
+          <p:cNvPr id="6" name="삽화:세요소.svg" descr="illust_2933358539836371565_1791735250.png"/>
           <p:cNvPicPr>
             <a:picLocks noChangeAspect="1"/>
           </p:cNvPicPr>
@@ -9390,7 +9390,7 @@
       </p:sp>
       <p:pic>
         <p:nvPicPr>
-          <p:cNvPr id="6" name="삽화:실행고리.svg" descr="illust_3213244933606313500_1791735250.png"/>
+          <p:cNvPr id="6" name="삽화:실행고리.svg" descr="illust_5581878106090890971_1791735250.png"/>
           <p:cNvPicPr>
             <a:picLocks noChangeAspect="1"/>
           </p:cNvPicPr>
@@ -12594,7 +12594,7 @@
       </p:sp>
       <p:pic>
         <p:nvPicPr>
-          <p:cNvPr id="6" name="삽화:정보원.svg" descr="illust_7330296551274853820_1791735250.png"/>
+          <p:cNvPr id="6" name="삽화:정보원.svg" descr="illust_8634754822599518487_1791735250.png"/>
           <p:cNvPicPr>
             <a:picLocks noChangeAspect="1"/>
           </p:cNvPicPr>
@@ -15159,7 +15159,7 @@
       </p:sp>
       <p:pic>
         <p:nvPicPr>
-          <p:cNvPr id="6" name="삽화:도구경유.svg" descr="illust_5095950272148128308_1791735250.png"/>
+          <p:cNvPr id="6" name="삽화:도구경유.svg" descr="illust_7613178363402488149_1791735250.png"/>
           <p:cNvPicPr>
             <a:picLocks noChangeAspect="1"/>
           </p:cNvPicPr>
@@ -16330,7 +16330,7 @@
       </p:sp>
       <p:pic>
         <p:nvPicPr>
-          <p:cNvPr id="6" name="삽화:신선도.svg" descr="illust_6882843633699982963_1791735250.png"/>
+          <p:cNvPr id="6" name="삽화:신선도.svg" descr="illust_4778984127726303428_1791735250.png"/>
           <p:cNvPicPr>
             <a:picLocks noChangeAspect="1"/>
           </p:cNvPicPr>
@@ -16757,7 +16757,7 @@
       </p:sp>
       <p:pic>
         <p:nvPicPr>
-          <p:cNvPr id="6" name="삽화:멈춤조건.svg" descr="illust_8585131145586572732_1791735250.png"/>
+          <p:cNvPr id="6" name="삽화:멈춤조건.svg" descr="illust_2311611812431344011_1791735250.png"/>
           <p:cNvPicPr>
             <a:picLocks noChangeAspect="1"/>
           </p:cNvPicPr>
@@ -31183,7 +31183,7 @@
       </p:sp>
       <p:pic>
         <p:nvPicPr>
-          <p:cNvPr id="6" name="삽화:경보에서승인까지.svg" descr="illust_8277667436112678899_1791735250.png"/>
+          <p:cNvPr id="6" name="삽화:경보에서승인까지.svg" descr="illust_1642667369634261539_1791735250.png"/>
           <p:cNvPicPr>
             <a:picLocks noChangeAspect="1"/>
           </p:cNvPicPr>

--- a/docs/교재/실전반_오프라인/04회차/실전반_오프라인_04회차.pptx
+++ b/docs/교재/실전반_오프라인/04회차/실전반_오프라인_04회차.pptx
@@ -1802,7 +1802,7 @@
           <a:lstStyle/>
           <a:p>
             <a:r>
-              <a:t>둘째 실습은 VS Code에서 Claude Code로 진행합니다. 공용 온톨로지의 관계와 제공된 센서 입력을 읽어 후보 원인과 증거, 다음 점검 순서를 내는 에이전트를 구성합니다. 확인되지 않은 원인은 단정하지 않고 가설로 표시해야 합니다. 끝나면 점검 계획과 그 계획에 쓴 근거가 파일로 남습니다.</a:t>
+              <a:t>둘째 실습은 바이브 코딩으로 진행합니다. 공용 온톨로지의 관계와 제공된 센서 입력을 읽어 후보 원인과 증거, 다음 점검 순서를 내는 에이전트를 구성합니다. 확인되지 않은 원인은 단정하지 않고 가설로 표시해야 합니다. 끝나면 점검 계획과 그 계획에 쓴 근거가 파일로 남습니다.</a:t>
             </a:r>
           </a:p>
         </p:txBody>
@@ -7268,7 +7268,7 @@
       </p:sp>
       <p:pic>
         <p:nvPicPr>
-          <p:cNvPr id="6" name="삽화:세요소.svg" descr="illust_2933358539836371565_1791735250.png"/>
+          <p:cNvPr id="6" name="삽화:세요소.svg" descr="illust_4183771962951262661_1791735250.png"/>
           <p:cNvPicPr>
             <a:picLocks noChangeAspect="1"/>
           </p:cNvPicPr>
@@ -9390,7 +9390,7 @@
       </p:sp>
       <p:pic>
         <p:nvPicPr>
-          <p:cNvPr id="6" name="삽화:실행고리.svg" descr="illust_5581878106090890971_1791735250.png"/>
+          <p:cNvPr id="6" name="삽화:실행고리.svg" descr="illust_725593397133183508_1791735250.png"/>
           <p:cNvPicPr>
             <a:picLocks noChangeAspect="1"/>
           </p:cNvPicPr>
@@ -12594,7 +12594,7 @@
       </p:sp>
       <p:pic>
         <p:nvPicPr>
-          <p:cNvPr id="6" name="삽화:정보원.svg" descr="illust_8634754822599518487_1791735250.png"/>
+          <p:cNvPr id="6" name="삽화:정보원.svg" descr="illust_1749510148644373805_1791735250.png"/>
           <p:cNvPicPr>
             <a:picLocks noChangeAspect="1"/>
           </p:cNvPicPr>
@@ -15159,7 +15159,7 @@
       </p:sp>
       <p:pic>
         <p:nvPicPr>
-          <p:cNvPr id="6" name="삽화:도구경유.svg" descr="illust_7613178363402488149_1791735250.png"/>
+          <p:cNvPr id="6" name="삽화:도구경유.svg" descr="illust_3845867262231763553_1791735250.png"/>
           <p:cNvPicPr>
             <a:picLocks noChangeAspect="1"/>
           </p:cNvPicPr>
@@ -16330,7 +16330,7 @@
       </p:sp>
       <p:pic>
         <p:nvPicPr>
-          <p:cNvPr id="6" name="삽화:신선도.svg" descr="illust_4778984127726303428_1791735250.png"/>
+          <p:cNvPr id="6" name="삽화:신선도.svg" descr="illust_1674627401835284843_1791735250.png"/>
           <p:cNvPicPr>
             <a:picLocks noChangeAspect="1"/>
           </p:cNvPicPr>
@@ -16757,7 +16757,7 @@
       </p:sp>
       <p:pic>
         <p:nvPicPr>
-          <p:cNvPr id="6" name="삽화:멈춤조건.svg" descr="illust_2311611812431344011_1791735250.png"/>
+          <p:cNvPr id="6" name="삽화:멈춤조건.svg" descr="illust_8083451689887523189_1791735250.png"/>
           <p:cNvPicPr>
             <a:picLocks noChangeAspect="1"/>
           </p:cNvPicPr>
@@ -22851,7 +22851,7 @@
                 <a:ea typeface="맑은 고딕"/>
                 <a:cs typeface="맑은 고딕"/>
               </a:rPr>
-              <a:t>Claude Code로 온톨로지의 관계와 센서 입력을 읽어 점검 계획을 내는 에이전트를 구성한다</a:t>
+              <a:t>바이브 코딩으로 온톨로지의 관계와 센서 입력을 읽어 점검 계획을 내는 에이전트를 구성한다</a:t>
             </a:r>
           </a:p>
         </p:txBody>
@@ -31183,7 +31183,7 @@
       </p:sp>
       <p:pic>
         <p:nvPicPr>
-          <p:cNvPr id="6" name="삽화:경보에서승인까지.svg" descr="illust_1642667369634261539_1791735250.png"/>
+          <p:cNvPr id="6" name="삽화:경보에서승인까지.svg" descr="illust_8468704568140479212_1791735250.png"/>
           <p:cNvPicPr>
             <a:picLocks noChangeAspect="1"/>
           </p:cNvPicPr>
